--- a/FinML/01 - Intro/Presentation/01 - Intro.pptx
+++ b/FinML/01 - Intro/Presentation/01 - Intro.pptx
@@ -76,7 +76,7 @@
   <p:notesSz cx="6858000" cy="9144000"/>
   <p:embeddedFontLst>
     <p:embeddedFont>
-      <p:font typeface="AkayaTelivigala" pitchFamily="2" charset="77"/>
+      <p:font typeface="AkayaTelivigala" panose="020F0502020204030204" pitchFamily="34" charset="0"/>
       <p:regular r:id="rId66"/>
       <p:bold r:id="rId67"/>
       <p:italic r:id="rId68"/>
@@ -16215,9 +16215,13 @@
             </a:r>
             <a:r>
               <a:rPr lang="ru-RU" sz="1200" b="1" dirty="0"/>
-              <a:t>, главный инженер проекта</a:t>
-            </a:r>
-            <a:endParaRPr lang="en-US" sz="1200" b="1" dirty="0"/>
+              <a:t> </a:t>
+            </a:r>
+            <a:r>
+              <a:rPr lang="en-US" sz="1200" b="1" dirty="0"/>
+              <a:t>DM-Solutions</a:t>
+            </a:r>
+            <a:endParaRPr lang="ru-RU" sz="1200" b="1" dirty="0"/>
           </a:p>
           <a:p>
             <a:pPr marL="0" indent="0">
@@ -16227,6 +16231,16 @@
               <a:buSzPts val="597"/>
               <a:buNone/>
             </a:pPr>
+            <a:endParaRPr lang="en-US" sz="1200" b="1" dirty="0"/>
+          </a:p>
+          <a:p>
+            <a:pPr marL="0" indent="0">
+              <a:lnSpc>
+                <a:spcPct val="100000"/>
+              </a:lnSpc>
+              <a:buSzPts val="597"/>
+              <a:buNone/>
+            </a:pPr>
             <a:r>
               <a:rPr lang="ru-RU" sz="1200" b="1" dirty="0"/>
               <a:t>Физический факультет МГУ</a:t>
@@ -16272,9 +16286,8 @@
             </a:pPr>
             <a:r>
               <a:rPr lang="ru" sz="1200" dirty="0"/>
-              <a:t>15+ лет опыта в прикладной математике и математическом моделировании НИИгазэкономика ПАО Газпром</a:t>
-            </a:r>
-            <a:endParaRPr sz="1200" dirty="0"/>
+              <a:t>15+ лет опыта в прикладной математике и математическом моделировании</a:t>
+            </a:r>
           </a:p>
           <a:p>
             <a:pPr marL="0" lvl="0" indent="0" algn="l" rtl="0">
@@ -19205,185 +19218,6 @@
           </a:fontRef>
         </p:style>
       </p:cxnSp>
-      <p:sp>
-        <p:nvSpPr>
-          <p:cNvPr id="8" name="TextBox 7">
-            <a:extLst>
-              <a:ext uri="{FF2B5EF4-FFF2-40B4-BE49-F238E27FC236}">
-                <a16:creationId xmlns:a16="http://schemas.microsoft.com/office/drawing/2014/main" id="{6F6F7B92-1FC8-F044-8809-FBF8C1B8F030}"/>
-              </a:ext>
-            </a:extLst>
-          </p:cNvPr>
-          <p:cNvSpPr txBox="1"/>
-          <p:nvPr/>
-        </p:nvSpPr>
-        <p:spPr>
-          <a:xfrm>
-            <a:off x="1082487" y="1951507"/>
-            <a:ext cx="662361" cy="276999"/>
-          </a:xfrm>
-          <a:prstGeom prst="rect">
-            <a:avLst/>
-          </a:prstGeom>
-          <a:noFill/>
-        </p:spPr>
-        <p:txBody>
-          <a:bodyPr wrap="none" rtlCol="0">
-            <a:spAutoFit/>
-          </a:bodyPr>
-          <a:lstStyle/>
-          <a:p>
-            <a:r>
-              <a:rPr lang="ru-RU" sz="1200" dirty="0"/>
-              <a:t>31</a:t>
-            </a:r>
-            <a:r>
-              <a:rPr lang="en-US" sz="1200" dirty="0"/>
-              <a:t>.07 -</a:t>
-            </a:r>
-          </a:p>
-        </p:txBody>
-      </p:sp>
-      <p:sp>
-        <p:nvSpPr>
-          <p:cNvPr id="24" name="TextBox 23">
-            <a:extLst>
-              <a:ext uri="{FF2B5EF4-FFF2-40B4-BE49-F238E27FC236}">
-                <a16:creationId xmlns:a16="http://schemas.microsoft.com/office/drawing/2014/main" id="{E5434182-F8BC-6A45-B76D-A6DDAA3D9E00}"/>
-              </a:ext>
-            </a:extLst>
-          </p:cNvPr>
-          <p:cNvSpPr txBox="1"/>
-          <p:nvPr/>
-        </p:nvSpPr>
-        <p:spPr>
-          <a:xfrm>
-            <a:off x="1082487" y="2451661"/>
-            <a:ext cx="662361" cy="276999"/>
-          </a:xfrm>
-          <a:prstGeom prst="rect">
-            <a:avLst/>
-          </a:prstGeom>
-          <a:noFill/>
-        </p:spPr>
-        <p:txBody>
-          <a:bodyPr wrap="none" rtlCol="0">
-            <a:spAutoFit/>
-          </a:bodyPr>
-          <a:lstStyle/>
-          <a:p>
-            <a:r>
-              <a:rPr lang="en-US" sz="1200" dirty="0"/>
-              <a:t>07.08 -</a:t>
-            </a:r>
-          </a:p>
-        </p:txBody>
-      </p:sp>
-      <p:sp>
-        <p:nvSpPr>
-          <p:cNvPr id="25" name="TextBox 24">
-            <a:extLst>
-              <a:ext uri="{FF2B5EF4-FFF2-40B4-BE49-F238E27FC236}">
-                <a16:creationId xmlns:a16="http://schemas.microsoft.com/office/drawing/2014/main" id="{B1FFEC08-4192-194E-9CDB-196400C6DFCC}"/>
-              </a:ext>
-            </a:extLst>
-          </p:cNvPr>
-          <p:cNvSpPr txBox="1"/>
-          <p:nvPr/>
-        </p:nvSpPr>
-        <p:spPr>
-          <a:xfrm>
-            <a:off x="1082487" y="2966252"/>
-            <a:ext cx="662361" cy="276999"/>
-          </a:xfrm>
-          <a:prstGeom prst="rect">
-            <a:avLst/>
-          </a:prstGeom>
-          <a:noFill/>
-        </p:spPr>
-        <p:txBody>
-          <a:bodyPr wrap="none" rtlCol="0">
-            <a:spAutoFit/>
-          </a:bodyPr>
-          <a:lstStyle/>
-          <a:p>
-            <a:r>
-              <a:rPr lang="en-US" sz="1200" dirty="0"/>
-              <a:t>12.08 -</a:t>
-            </a:r>
-          </a:p>
-        </p:txBody>
-      </p:sp>
-      <p:sp>
-        <p:nvSpPr>
-          <p:cNvPr id="26" name="TextBox 25">
-            <a:extLst>
-              <a:ext uri="{FF2B5EF4-FFF2-40B4-BE49-F238E27FC236}">
-                <a16:creationId xmlns:a16="http://schemas.microsoft.com/office/drawing/2014/main" id="{63DA3473-8780-494C-8D9C-4086F1D06A63}"/>
-              </a:ext>
-            </a:extLst>
-          </p:cNvPr>
-          <p:cNvSpPr txBox="1"/>
-          <p:nvPr/>
-        </p:nvSpPr>
-        <p:spPr>
-          <a:xfrm>
-            <a:off x="1082487" y="3469826"/>
-            <a:ext cx="662361" cy="276999"/>
-          </a:xfrm>
-          <a:prstGeom prst="rect">
-            <a:avLst/>
-          </a:prstGeom>
-          <a:noFill/>
-        </p:spPr>
-        <p:txBody>
-          <a:bodyPr wrap="none" rtlCol="0">
-            <a:spAutoFit/>
-          </a:bodyPr>
-          <a:lstStyle/>
-          <a:p>
-            <a:r>
-              <a:rPr lang="en-US" sz="1200" dirty="0"/>
-              <a:t>14.08 -</a:t>
-            </a:r>
-          </a:p>
-        </p:txBody>
-      </p:sp>
-      <p:sp>
-        <p:nvSpPr>
-          <p:cNvPr id="27" name="TextBox 26">
-            <a:extLst>
-              <a:ext uri="{FF2B5EF4-FFF2-40B4-BE49-F238E27FC236}">
-                <a16:creationId xmlns:a16="http://schemas.microsoft.com/office/drawing/2014/main" id="{41F47461-4FA5-1F4E-B2BC-75B5E5DD97B3}"/>
-              </a:ext>
-            </a:extLst>
-          </p:cNvPr>
-          <p:cNvSpPr txBox="1"/>
-          <p:nvPr/>
-        </p:nvSpPr>
-        <p:spPr>
-          <a:xfrm>
-            <a:off x="1082487" y="3980043"/>
-            <a:ext cx="662361" cy="276999"/>
-          </a:xfrm>
-          <a:prstGeom prst="rect">
-            <a:avLst/>
-          </a:prstGeom>
-          <a:noFill/>
-        </p:spPr>
-        <p:txBody>
-          <a:bodyPr wrap="none" rtlCol="0">
-            <a:spAutoFit/>
-          </a:bodyPr>
-          <a:lstStyle/>
-          <a:p>
-            <a:r>
-              <a:rPr lang="en-US" sz="1200" dirty="0"/>
-              <a:t>19.08 -</a:t>
-            </a:r>
-          </a:p>
-        </p:txBody>
-      </p:sp>
       <p:pic>
         <p:nvPicPr>
           <p:cNvPr id="32" name="Google Shape;225;p40">
@@ -20357,189 +20191,6 @@
           </a:fontRef>
         </p:style>
       </p:cxnSp>
-      <p:sp>
-        <p:nvSpPr>
-          <p:cNvPr id="8" name="TextBox 7">
-            <a:extLst>
-              <a:ext uri="{FF2B5EF4-FFF2-40B4-BE49-F238E27FC236}">
-                <a16:creationId xmlns:a16="http://schemas.microsoft.com/office/drawing/2014/main" id="{6F6F7B92-1FC8-F044-8809-FBF8C1B8F030}"/>
-              </a:ext>
-            </a:extLst>
-          </p:cNvPr>
-          <p:cNvSpPr txBox="1"/>
-          <p:nvPr/>
-        </p:nvSpPr>
-        <p:spPr>
-          <a:xfrm>
-            <a:off x="1082487" y="1951507"/>
-            <a:ext cx="662361" cy="276999"/>
-          </a:xfrm>
-          <a:prstGeom prst="rect">
-            <a:avLst/>
-          </a:prstGeom>
-          <a:noFill/>
-        </p:spPr>
-        <p:txBody>
-          <a:bodyPr wrap="none" rtlCol="0">
-            <a:spAutoFit/>
-          </a:bodyPr>
-          <a:lstStyle/>
-          <a:p>
-            <a:r>
-              <a:rPr lang="en-US" sz="1200" dirty="0"/>
-              <a:t>2</a:t>
-            </a:r>
-            <a:r>
-              <a:rPr lang="ru-RU" sz="1200" dirty="0"/>
-              <a:t>1</a:t>
-            </a:r>
-            <a:r>
-              <a:rPr lang="en-US" sz="1200" dirty="0"/>
-              <a:t>.08 -</a:t>
-            </a:r>
-          </a:p>
-        </p:txBody>
-      </p:sp>
-      <p:sp>
-        <p:nvSpPr>
-          <p:cNvPr id="24" name="TextBox 23">
-            <a:extLst>
-              <a:ext uri="{FF2B5EF4-FFF2-40B4-BE49-F238E27FC236}">
-                <a16:creationId xmlns:a16="http://schemas.microsoft.com/office/drawing/2014/main" id="{E5434182-F8BC-6A45-B76D-A6DDAA3D9E00}"/>
-              </a:ext>
-            </a:extLst>
-          </p:cNvPr>
-          <p:cNvSpPr txBox="1"/>
-          <p:nvPr/>
-        </p:nvSpPr>
-        <p:spPr>
-          <a:xfrm>
-            <a:off x="1082487" y="2451661"/>
-            <a:ext cx="662361" cy="276999"/>
-          </a:xfrm>
-          <a:prstGeom prst="rect">
-            <a:avLst/>
-          </a:prstGeom>
-          <a:noFill/>
-        </p:spPr>
-        <p:txBody>
-          <a:bodyPr wrap="none" rtlCol="0">
-            <a:spAutoFit/>
-          </a:bodyPr>
-          <a:lstStyle/>
-          <a:p>
-            <a:r>
-              <a:rPr lang="en-US" sz="1200" dirty="0"/>
-              <a:t>26.08 -</a:t>
-            </a:r>
-          </a:p>
-        </p:txBody>
-      </p:sp>
-      <p:sp>
-        <p:nvSpPr>
-          <p:cNvPr id="25" name="TextBox 24">
-            <a:extLst>
-              <a:ext uri="{FF2B5EF4-FFF2-40B4-BE49-F238E27FC236}">
-                <a16:creationId xmlns:a16="http://schemas.microsoft.com/office/drawing/2014/main" id="{B1FFEC08-4192-194E-9CDB-196400C6DFCC}"/>
-              </a:ext>
-            </a:extLst>
-          </p:cNvPr>
-          <p:cNvSpPr txBox="1"/>
-          <p:nvPr/>
-        </p:nvSpPr>
-        <p:spPr>
-          <a:xfrm>
-            <a:off x="1082487" y="2966252"/>
-            <a:ext cx="662361" cy="276999"/>
-          </a:xfrm>
-          <a:prstGeom prst="rect">
-            <a:avLst/>
-          </a:prstGeom>
-          <a:noFill/>
-        </p:spPr>
-        <p:txBody>
-          <a:bodyPr wrap="none" rtlCol="0">
-            <a:spAutoFit/>
-          </a:bodyPr>
-          <a:lstStyle/>
-          <a:p>
-            <a:r>
-              <a:rPr lang="en-US" sz="1200" dirty="0"/>
-              <a:t>28.08 -</a:t>
-            </a:r>
-          </a:p>
-        </p:txBody>
-      </p:sp>
-      <p:sp>
-        <p:nvSpPr>
-          <p:cNvPr id="26" name="TextBox 25">
-            <a:extLst>
-              <a:ext uri="{FF2B5EF4-FFF2-40B4-BE49-F238E27FC236}">
-                <a16:creationId xmlns:a16="http://schemas.microsoft.com/office/drawing/2014/main" id="{63DA3473-8780-494C-8D9C-4086F1D06A63}"/>
-              </a:ext>
-            </a:extLst>
-          </p:cNvPr>
-          <p:cNvSpPr txBox="1"/>
-          <p:nvPr/>
-        </p:nvSpPr>
-        <p:spPr>
-          <a:xfrm>
-            <a:off x="1082487" y="3469826"/>
-            <a:ext cx="662361" cy="276999"/>
-          </a:xfrm>
-          <a:prstGeom prst="rect">
-            <a:avLst/>
-          </a:prstGeom>
-          <a:noFill/>
-        </p:spPr>
-        <p:txBody>
-          <a:bodyPr wrap="none" rtlCol="0">
-            <a:spAutoFit/>
-          </a:bodyPr>
-          <a:lstStyle/>
-          <a:p>
-            <a:r>
-              <a:rPr lang="en-US" sz="1200" dirty="0"/>
-              <a:t>02.09 -</a:t>
-            </a:r>
-          </a:p>
-        </p:txBody>
-      </p:sp>
-      <p:sp>
-        <p:nvSpPr>
-          <p:cNvPr id="27" name="TextBox 26">
-            <a:extLst>
-              <a:ext uri="{FF2B5EF4-FFF2-40B4-BE49-F238E27FC236}">
-                <a16:creationId xmlns:a16="http://schemas.microsoft.com/office/drawing/2014/main" id="{41F47461-4FA5-1F4E-B2BC-75B5E5DD97B3}"/>
-              </a:ext>
-            </a:extLst>
-          </p:cNvPr>
-          <p:cNvSpPr txBox="1"/>
-          <p:nvPr/>
-        </p:nvSpPr>
-        <p:spPr>
-          <a:xfrm>
-            <a:off x="1082487" y="3980043"/>
-            <a:ext cx="662361" cy="276999"/>
-          </a:xfrm>
-          <a:prstGeom prst="rect">
-            <a:avLst/>
-          </a:prstGeom>
-          <a:noFill/>
-        </p:spPr>
-        <p:txBody>
-          <a:bodyPr wrap="none" rtlCol="0">
-            <a:spAutoFit/>
-          </a:bodyPr>
-          <a:lstStyle/>
-          <a:p>
-            <a:r>
-              <a:rPr lang="en-US" sz="1200" dirty="0"/>
-              <a:t>04.09 -</a:t>
-            </a:r>
-          </a:p>
-        </p:txBody>
-      </p:sp>
       <p:pic>
         <p:nvPicPr>
           <p:cNvPr id="28" name="Google Shape;225;p40">
@@ -21599,181 +21250,6 @@
           </a:fontRef>
         </p:style>
       </p:cxnSp>
-      <p:sp>
-        <p:nvSpPr>
-          <p:cNvPr id="8" name="TextBox 7">
-            <a:extLst>
-              <a:ext uri="{FF2B5EF4-FFF2-40B4-BE49-F238E27FC236}">
-                <a16:creationId xmlns:a16="http://schemas.microsoft.com/office/drawing/2014/main" id="{6F6F7B92-1FC8-F044-8809-FBF8C1B8F030}"/>
-              </a:ext>
-            </a:extLst>
-          </p:cNvPr>
-          <p:cNvSpPr txBox="1"/>
-          <p:nvPr/>
-        </p:nvSpPr>
-        <p:spPr>
-          <a:xfrm>
-            <a:off x="1082487" y="1951507"/>
-            <a:ext cx="662361" cy="276999"/>
-          </a:xfrm>
-          <a:prstGeom prst="rect">
-            <a:avLst/>
-          </a:prstGeom>
-          <a:noFill/>
-        </p:spPr>
-        <p:txBody>
-          <a:bodyPr wrap="none" rtlCol="0">
-            <a:spAutoFit/>
-          </a:bodyPr>
-          <a:lstStyle/>
-          <a:p>
-            <a:r>
-              <a:rPr lang="en-US" sz="1200" dirty="0"/>
-              <a:t>09.09 -</a:t>
-            </a:r>
-          </a:p>
-        </p:txBody>
-      </p:sp>
-      <p:sp>
-        <p:nvSpPr>
-          <p:cNvPr id="24" name="TextBox 23">
-            <a:extLst>
-              <a:ext uri="{FF2B5EF4-FFF2-40B4-BE49-F238E27FC236}">
-                <a16:creationId xmlns:a16="http://schemas.microsoft.com/office/drawing/2014/main" id="{E5434182-F8BC-6A45-B76D-A6DDAA3D9E00}"/>
-              </a:ext>
-            </a:extLst>
-          </p:cNvPr>
-          <p:cNvSpPr txBox="1"/>
-          <p:nvPr/>
-        </p:nvSpPr>
-        <p:spPr>
-          <a:xfrm>
-            <a:off x="1082487" y="2451661"/>
-            <a:ext cx="662361" cy="276999"/>
-          </a:xfrm>
-          <a:prstGeom prst="rect">
-            <a:avLst/>
-          </a:prstGeom>
-          <a:noFill/>
-        </p:spPr>
-        <p:txBody>
-          <a:bodyPr wrap="none" rtlCol="0">
-            <a:spAutoFit/>
-          </a:bodyPr>
-          <a:lstStyle/>
-          <a:p>
-            <a:r>
-              <a:rPr lang="en-US" sz="1200" dirty="0"/>
-              <a:t>11.09 -</a:t>
-            </a:r>
-          </a:p>
-        </p:txBody>
-      </p:sp>
-      <p:sp>
-        <p:nvSpPr>
-          <p:cNvPr id="25" name="TextBox 24">
-            <a:extLst>
-              <a:ext uri="{FF2B5EF4-FFF2-40B4-BE49-F238E27FC236}">
-                <a16:creationId xmlns:a16="http://schemas.microsoft.com/office/drawing/2014/main" id="{B1FFEC08-4192-194E-9CDB-196400C6DFCC}"/>
-              </a:ext>
-            </a:extLst>
-          </p:cNvPr>
-          <p:cNvSpPr txBox="1"/>
-          <p:nvPr/>
-        </p:nvSpPr>
-        <p:spPr>
-          <a:xfrm>
-            <a:off x="1082487" y="2966252"/>
-            <a:ext cx="662361" cy="276999"/>
-          </a:xfrm>
-          <a:prstGeom prst="rect">
-            <a:avLst/>
-          </a:prstGeom>
-          <a:noFill/>
-        </p:spPr>
-        <p:txBody>
-          <a:bodyPr wrap="none" rtlCol="0">
-            <a:spAutoFit/>
-          </a:bodyPr>
-          <a:lstStyle/>
-          <a:p>
-            <a:r>
-              <a:rPr lang="en-US" sz="1200" dirty="0"/>
-              <a:t>16.09 -</a:t>
-            </a:r>
-          </a:p>
-        </p:txBody>
-      </p:sp>
-      <p:sp>
-        <p:nvSpPr>
-          <p:cNvPr id="26" name="TextBox 25">
-            <a:extLst>
-              <a:ext uri="{FF2B5EF4-FFF2-40B4-BE49-F238E27FC236}">
-                <a16:creationId xmlns:a16="http://schemas.microsoft.com/office/drawing/2014/main" id="{63DA3473-8780-494C-8D9C-4086F1D06A63}"/>
-              </a:ext>
-            </a:extLst>
-          </p:cNvPr>
-          <p:cNvSpPr txBox="1"/>
-          <p:nvPr/>
-        </p:nvSpPr>
-        <p:spPr>
-          <a:xfrm>
-            <a:off x="1082487" y="3469826"/>
-            <a:ext cx="662361" cy="276999"/>
-          </a:xfrm>
-          <a:prstGeom prst="rect">
-            <a:avLst/>
-          </a:prstGeom>
-          <a:noFill/>
-        </p:spPr>
-        <p:txBody>
-          <a:bodyPr wrap="none" rtlCol="0">
-            <a:spAutoFit/>
-          </a:bodyPr>
-          <a:lstStyle/>
-          <a:p>
-            <a:r>
-              <a:rPr lang="en-US" sz="1200" dirty="0"/>
-              <a:t>18.09 -</a:t>
-            </a:r>
-          </a:p>
-        </p:txBody>
-      </p:sp>
-      <p:sp>
-        <p:nvSpPr>
-          <p:cNvPr id="27" name="TextBox 26">
-            <a:extLst>
-              <a:ext uri="{FF2B5EF4-FFF2-40B4-BE49-F238E27FC236}">
-                <a16:creationId xmlns:a16="http://schemas.microsoft.com/office/drawing/2014/main" id="{41F47461-4FA5-1F4E-B2BC-75B5E5DD97B3}"/>
-              </a:ext>
-            </a:extLst>
-          </p:cNvPr>
-          <p:cNvSpPr txBox="1"/>
-          <p:nvPr/>
-        </p:nvSpPr>
-        <p:spPr>
-          <a:xfrm>
-            <a:off x="1082487" y="3980043"/>
-            <a:ext cx="662361" cy="276999"/>
-          </a:xfrm>
-          <a:prstGeom prst="rect">
-            <a:avLst/>
-          </a:prstGeom>
-          <a:noFill/>
-        </p:spPr>
-        <p:txBody>
-          <a:bodyPr wrap="none" rtlCol="0">
-            <a:spAutoFit/>
-          </a:bodyPr>
-          <a:lstStyle/>
-          <a:p>
-            <a:r>
-              <a:rPr lang="en-US" sz="1200" dirty="0"/>
-              <a:t>23.09 -</a:t>
-            </a:r>
-          </a:p>
-        </p:txBody>
-      </p:sp>
       <p:pic>
         <p:nvPicPr>
           <p:cNvPr id="46" name="Google Shape;530;p82">
@@ -22845,181 +22321,6 @@
           </a:fontRef>
         </p:style>
       </p:cxnSp>
-      <p:sp>
-        <p:nvSpPr>
-          <p:cNvPr id="8" name="TextBox 7">
-            <a:extLst>
-              <a:ext uri="{FF2B5EF4-FFF2-40B4-BE49-F238E27FC236}">
-                <a16:creationId xmlns:a16="http://schemas.microsoft.com/office/drawing/2014/main" id="{6F6F7B92-1FC8-F044-8809-FBF8C1B8F030}"/>
-              </a:ext>
-            </a:extLst>
-          </p:cNvPr>
-          <p:cNvSpPr txBox="1"/>
-          <p:nvPr/>
-        </p:nvSpPr>
-        <p:spPr>
-          <a:xfrm>
-            <a:off x="1082487" y="1951507"/>
-            <a:ext cx="662361" cy="276999"/>
-          </a:xfrm>
-          <a:prstGeom prst="rect">
-            <a:avLst/>
-          </a:prstGeom>
-          <a:noFill/>
-        </p:spPr>
-        <p:txBody>
-          <a:bodyPr wrap="none" rtlCol="0">
-            <a:spAutoFit/>
-          </a:bodyPr>
-          <a:lstStyle/>
-          <a:p>
-            <a:r>
-              <a:rPr lang="en-US" sz="1200" dirty="0"/>
-              <a:t>02.10 -</a:t>
-            </a:r>
-          </a:p>
-        </p:txBody>
-      </p:sp>
-      <p:sp>
-        <p:nvSpPr>
-          <p:cNvPr id="24" name="TextBox 23">
-            <a:extLst>
-              <a:ext uri="{FF2B5EF4-FFF2-40B4-BE49-F238E27FC236}">
-                <a16:creationId xmlns:a16="http://schemas.microsoft.com/office/drawing/2014/main" id="{E5434182-F8BC-6A45-B76D-A6DDAA3D9E00}"/>
-              </a:ext>
-            </a:extLst>
-          </p:cNvPr>
-          <p:cNvSpPr txBox="1"/>
-          <p:nvPr/>
-        </p:nvSpPr>
-        <p:spPr>
-          <a:xfrm>
-            <a:off x="1082487" y="2451661"/>
-            <a:ext cx="662361" cy="276999"/>
-          </a:xfrm>
-          <a:prstGeom prst="rect">
-            <a:avLst/>
-          </a:prstGeom>
-          <a:noFill/>
-        </p:spPr>
-        <p:txBody>
-          <a:bodyPr wrap="none" rtlCol="0">
-            <a:spAutoFit/>
-          </a:bodyPr>
-          <a:lstStyle/>
-          <a:p>
-            <a:r>
-              <a:rPr lang="en-US" sz="1200" dirty="0"/>
-              <a:t>07.10 -</a:t>
-            </a:r>
-          </a:p>
-        </p:txBody>
-      </p:sp>
-      <p:sp>
-        <p:nvSpPr>
-          <p:cNvPr id="25" name="TextBox 24">
-            <a:extLst>
-              <a:ext uri="{FF2B5EF4-FFF2-40B4-BE49-F238E27FC236}">
-                <a16:creationId xmlns:a16="http://schemas.microsoft.com/office/drawing/2014/main" id="{B1FFEC08-4192-194E-9CDB-196400C6DFCC}"/>
-              </a:ext>
-            </a:extLst>
-          </p:cNvPr>
-          <p:cNvSpPr txBox="1"/>
-          <p:nvPr/>
-        </p:nvSpPr>
-        <p:spPr>
-          <a:xfrm>
-            <a:off x="1082487" y="2966252"/>
-            <a:ext cx="662361" cy="276999"/>
-          </a:xfrm>
-          <a:prstGeom prst="rect">
-            <a:avLst/>
-          </a:prstGeom>
-          <a:noFill/>
-        </p:spPr>
-        <p:txBody>
-          <a:bodyPr wrap="none" rtlCol="0">
-            <a:spAutoFit/>
-          </a:bodyPr>
-          <a:lstStyle/>
-          <a:p>
-            <a:r>
-              <a:rPr lang="en-US" sz="1200" dirty="0"/>
-              <a:t>09.10 -</a:t>
-            </a:r>
-          </a:p>
-        </p:txBody>
-      </p:sp>
-      <p:sp>
-        <p:nvSpPr>
-          <p:cNvPr id="26" name="TextBox 25">
-            <a:extLst>
-              <a:ext uri="{FF2B5EF4-FFF2-40B4-BE49-F238E27FC236}">
-                <a16:creationId xmlns:a16="http://schemas.microsoft.com/office/drawing/2014/main" id="{63DA3473-8780-494C-8D9C-4086F1D06A63}"/>
-              </a:ext>
-            </a:extLst>
-          </p:cNvPr>
-          <p:cNvSpPr txBox="1"/>
-          <p:nvPr/>
-        </p:nvSpPr>
-        <p:spPr>
-          <a:xfrm>
-            <a:off x="1082487" y="3469826"/>
-            <a:ext cx="662361" cy="276999"/>
-          </a:xfrm>
-          <a:prstGeom prst="rect">
-            <a:avLst/>
-          </a:prstGeom>
-          <a:noFill/>
-        </p:spPr>
-        <p:txBody>
-          <a:bodyPr wrap="none" rtlCol="0">
-            <a:spAutoFit/>
-          </a:bodyPr>
-          <a:lstStyle/>
-          <a:p>
-            <a:r>
-              <a:rPr lang="en-US" sz="1200" dirty="0"/>
-              <a:t>14.10 -</a:t>
-            </a:r>
-          </a:p>
-        </p:txBody>
-      </p:sp>
-      <p:sp>
-        <p:nvSpPr>
-          <p:cNvPr id="27" name="TextBox 26">
-            <a:extLst>
-              <a:ext uri="{FF2B5EF4-FFF2-40B4-BE49-F238E27FC236}">
-                <a16:creationId xmlns:a16="http://schemas.microsoft.com/office/drawing/2014/main" id="{41F47461-4FA5-1F4E-B2BC-75B5E5DD97B3}"/>
-              </a:ext>
-            </a:extLst>
-          </p:cNvPr>
-          <p:cNvSpPr txBox="1"/>
-          <p:nvPr/>
-        </p:nvSpPr>
-        <p:spPr>
-          <a:xfrm>
-            <a:off x="1082487" y="3980043"/>
-            <a:ext cx="662361" cy="276999"/>
-          </a:xfrm>
-          <a:prstGeom prst="rect">
-            <a:avLst/>
-          </a:prstGeom>
-          <a:noFill/>
-        </p:spPr>
-        <p:txBody>
-          <a:bodyPr wrap="none" rtlCol="0">
-            <a:spAutoFit/>
-          </a:bodyPr>
-          <a:lstStyle/>
-          <a:p>
-            <a:r>
-              <a:rPr lang="en-US" sz="1200" dirty="0"/>
-              <a:t>16.10 -</a:t>
-            </a:r>
-          </a:p>
-        </p:txBody>
-      </p:sp>
       <p:pic>
         <p:nvPicPr>
           <p:cNvPr id="46" name="Google Shape;530;p82">
@@ -24113,181 +23414,6 @@
           </a:fontRef>
         </p:style>
       </p:cxnSp>
-      <p:sp>
-        <p:nvSpPr>
-          <p:cNvPr id="8" name="TextBox 7">
-            <a:extLst>
-              <a:ext uri="{FF2B5EF4-FFF2-40B4-BE49-F238E27FC236}">
-                <a16:creationId xmlns:a16="http://schemas.microsoft.com/office/drawing/2014/main" id="{6F6F7B92-1FC8-F044-8809-FBF8C1B8F030}"/>
-              </a:ext>
-            </a:extLst>
-          </p:cNvPr>
-          <p:cNvSpPr txBox="1"/>
-          <p:nvPr/>
-        </p:nvSpPr>
-        <p:spPr>
-          <a:xfrm>
-            <a:off x="1082487" y="1951507"/>
-            <a:ext cx="662361" cy="276999"/>
-          </a:xfrm>
-          <a:prstGeom prst="rect">
-            <a:avLst/>
-          </a:prstGeom>
-          <a:noFill/>
-        </p:spPr>
-        <p:txBody>
-          <a:bodyPr wrap="none" rtlCol="0">
-            <a:spAutoFit/>
-          </a:bodyPr>
-          <a:lstStyle/>
-          <a:p>
-            <a:r>
-              <a:rPr lang="en-US" sz="1200" dirty="0"/>
-              <a:t>21.10 -</a:t>
-            </a:r>
-          </a:p>
-        </p:txBody>
-      </p:sp>
-      <p:sp>
-        <p:nvSpPr>
-          <p:cNvPr id="24" name="TextBox 23">
-            <a:extLst>
-              <a:ext uri="{FF2B5EF4-FFF2-40B4-BE49-F238E27FC236}">
-                <a16:creationId xmlns:a16="http://schemas.microsoft.com/office/drawing/2014/main" id="{E5434182-F8BC-6A45-B76D-A6DDAA3D9E00}"/>
-              </a:ext>
-            </a:extLst>
-          </p:cNvPr>
-          <p:cNvSpPr txBox="1"/>
-          <p:nvPr/>
-        </p:nvSpPr>
-        <p:spPr>
-          <a:xfrm>
-            <a:off x="1082487" y="2451661"/>
-            <a:ext cx="662361" cy="276999"/>
-          </a:xfrm>
-          <a:prstGeom prst="rect">
-            <a:avLst/>
-          </a:prstGeom>
-          <a:noFill/>
-        </p:spPr>
-        <p:txBody>
-          <a:bodyPr wrap="none" rtlCol="0">
-            <a:spAutoFit/>
-          </a:bodyPr>
-          <a:lstStyle/>
-          <a:p>
-            <a:r>
-              <a:rPr lang="en-US" sz="1200" dirty="0"/>
-              <a:t>23.10 -</a:t>
-            </a:r>
-          </a:p>
-        </p:txBody>
-      </p:sp>
-      <p:sp>
-        <p:nvSpPr>
-          <p:cNvPr id="25" name="TextBox 24">
-            <a:extLst>
-              <a:ext uri="{FF2B5EF4-FFF2-40B4-BE49-F238E27FC236}">
-                <a16:creationId xmlns:a16="http://schemas.microsoft.com/office/drawing/2014/main" id="{B1FFEC08-4192-194E-9CDB-196400C6DFCC}"/>
-              </a:ext>
-            </a:extLst>
-          </p:cNvPr>
-          <p:cNvSpPr txBox="1"/>
-          <p:nvPr/>
-        </p:nvSpPr>
-        <p:spPr>
-          <a:xfrm>
-            <a:off x="1082487" y="2966252"/>
-            <a:ext cx="662361" cy="276999"/>
-          </a:xfrm>
-          <a:prstGeom prst="rect">
-            <a:avLst/>
-          </a:prstGeom>
-          <a:noFill/>
-        </p:spPr>
-        <p:txBody>
-          <a:bodyPr wrap="none" rtlCol="0">
-            <a:spAutoFit/>
-          </a:bodyPr>
-          <a:lstStyle/>
-          <a:p>
-            <a:r>
-              <a:rPr lang="en-US" sz="1200" dirty="0"/>
-              <a:t>28.10 -</a:t>
-            </a:r>
-          </a:p>
-        </p:txBody>
-      </p:sp>
-      <p:sp>
-        <p:nvSpPr>
-          <p:cNvPr id="26" name="TextBox 25">
-            <a:extLst>
-              <a:ext uri="{FF2B5EF4-FFF2-40B4-BE49-F238E27FC236}">
-                <a16:creationId xmlns:a16="http://schemas.microsoft.com/office/drawing/2014/main" id="{63DA3473-8780-494C-8D9C-4086F1D06A63}"/>
-              </a:ext>
-            </a:extLst>
-          </p:cNvPr>
-          <p:cNvSpPr txBox="1"/>
-          <p:nvPr/>
-        </p:nvSpPr>
-        <p:spPr>
-          <a:xfrm>
-            <a:off x="1082487" y="3469826"/>
-            <a:ext cx="662361" cy="276999"/>
-          </a:xfrm>
-          <a:prstGeom prst="rect">
-            <a:avLst/>
-          </a:prstGeom>
-          <a:noFill/>
-        </p:spPr>
-        <p:txBody>
-          <a:bodyPr wrap="none" rtlCol="0">
-            <a:spAutoFit/>
-          </a:bodyPr>
-          <a:lstStyle/>
-          <a:p>
-            <a:r>
-              <a:rPr lang="en-US" sz="1200" dirty="0"/>
-              <a:t>30.10 -</a:t>
-            </a:r>
-          </a:p>
-        </p:txBody>
-      </p:sp>
-      <p:sp>
-        <p:nvSpPr>
-          <p:cNvPr id="27" name="TextBox 26">
-            <a:extLst>
-              <a:ext uri="{FF2B5EF4-FFF2-40B4-BE49-F238E27FC236}">
-                <a16:creationId xmlns:a16="http://schemas.microsoft.com/office/drawing/2014/main" id="{41F47461-4FA5-1F4E-B2BC-75B5E5DD97B3}"/>
-              </a:ext>
-            </a:extLst>
-          </p:cNvPr>
-          <p:cNvSpPr txBox="1"/>
-          <p:nvPr/>
-        </p:nvSpPr>
-        <p:spPr>
-          <a:xfrm>
-            <a:off x="1082487" y="3980043"/>
-            <a:ext cx="662361" cy="276999"/>
-          </a:xfrm>
-          <a:prstGeom prst="rect">
-            <a:avLst/>
-          </a:prstGeom>
-          <a:noFill/>
-        </p:spPr>
-        <p:txBody>
-          <a:bodyPr wrap="none" rtlCol="0">
-            <a:spAutoFit/>
-          </a:bodyPr>
-          <a:lstStyle/>
-          <a:p>
-            <a:r>
-              <a:rPr lang="en-US" sz="1200" dirty="0"/>
-              <a:t>11.11 -</a:t>
-            </a:r>
-          </a:p>
-        </p:txBody>
-      </p:sp>
       <p:pic>
         <p:nvPicPr>
           <p:cNvPr id="46" name="Google Shape;530;p82">
@@ -25383,181 +24509,6 @@
           </a:fontRef>
         </p:style>
       </p:cxnSp>
-      <p:sp>
-        <p:nvSpPr>
-          <p:cNvPr id="8" name="TextBox 7">
-            <a:extLst>
-              <a:ext uri="{FF2B5EF4-FFF2-40B4-BE49-F238E27FC236}">
-                <a16:creationId xmlns:a16="http://schemas.microsoft.com/office/drawing/2014/main" id="{6F6F7B92-1FC8-F044-8809-FBF8C1B8F030}"/>
-              </a:ext>
-            </a:extLst>
-          </p:cNvPr>
-          <p:cNvSpPr txBox="1"/>
-          <p:nvPr/>
-        </p:nvSpPr>
-        <p:spPr>
-          <a:xfrm>
-            <a:off x="1082487" y="1951507"/>
-            <a:ext cx="662361" cy="276999"/>
-          </a:xfrm>
-          <a:prstGeom prst="rect">
-            <a:avLst/>
-          </a:prstGeom>
-          <a:noFill/>
-        </p:spPr>
-        <p:txBody>
-          <a:bodyPr wrap="none" rtlCol="0">
-            <a:spAutoFit/>
-          </a:bodyPr>
-          <a:lstStyle/>
-          <a:p>
-            <a:r>
-              <a:rPr lang="en-US" sz="1200" dirty="0"/>
-              <a:t>13.11 -</a:t>
-            </a:r>
-          </a:p>
-        </p:txBody>
-      </p:sp>
-      <p:sp>
-        <p:nvSpPr>
-          <p:cNvPr id="24" name="TextBox 23">
-            <a:extLst>
-              <a:ext uri="{FF2B5EF4-FFF2-40B4-BE49-F238E27FC236}">
-                <a16:creationId xmlns:a16="http://schemas.microsoft.com/office/drawing/2014/main" id="{E5434182-F8BC-6A45-B76D-A6DDAA3D9E00}"/>
-              </a:ext>
-            </a:extLst>
-          </p:cNvPr>
-          <p:cNvSpPr txBox="1"/>
-          <p:nvPr/>
-        </p:nvSpPr>
-        <p:spPr>
-          <a:xfrm>
-            <a:off x="1082487" y="2451661"/>
-            <a:ext cx="662361" cy="276999"/>
-          </a:xfrm>
-          <a:prstGeom prst="rect">
-            <a:avLst/>
-          </a:prstGeom>
-          <a:noFill/>
-        </p:spPr>
-        <p:txBody>
-          <a:bodyPr wrap="none" rtlCol="0">
-            <a:spAutoFit/>
-          </a:bodyPr>
-          <a:lstStyle/>
-          <a:p>
-            <a:r>
-              <a:rPr lang="en-US" sz="1200" dirty="0"/>
-              <a:t>18.11 -</a:t>
-            </a:r>
-          </a:p>
-        </p:txBody>
-      </p:sp>
-      <p:sp>
-        <p:nvSpPr>
-          <p:cNvPr id="25" name="TextBox 24">
-            <a:extLst>
-              <a:ext uri="{FF2B5EF4-FFF2-40B4-BE49-F238E27FC236}">
-                <a16:creationId xmlns:a16="http://schemas.microsoft.com/office/drawing/2014/main" id="{B1FFEC08-4192-194E-9CDB-196400C6DFCC}"/>
-              </a:ext>
-            </a:extLst>
-          </p:cNvPr>
-          <p:cNvSpPr txBox="1"/>
-          <p:nvPr/>
-        </p:nvSpPr>
-        <p:spPr>
-          <a:xfrm>
-            <a:off x="1082487" y="2966252"/>
-            <a:ext cx="662361" cy="276999"/>
-          </a:xfrm>
-          <a:prstGeom prst="rect">
-            <a:avLst/>
-          </a:prstGeom>
-          <a:noFill/>
-        </p:spPr>
-        <p:txBody>
-          <a:bodyPr wrap="none" rtlCol="0">
-            <a:spAutoFit/>
-          </a:bodyPr>
-          <a:lstStyle/>
-          <a:p>
-            <a:r>
-              <a:rPr lang="en-US" sz="1200" dirty="0"/>
-              <a:t>20.11 -</a:t>
-            </a:r>
-          </a:p>
-        </p:txBody>
-      </p:sp>
-      <p:sp>
-        <p:nvSpPr>
-          <p:cNvPr id="26" name="TextBox 25">
-            <a:extLst>
-              <a:ext uri="{FF2B5EF4-FFF2-40B4-BE49-F238E27FC236}">
-                <a16:creationId xmlns:a16="http://schemas.microsoft.com/office/drawing/2014/main" id="{63DA3473-8780-494C-8D9C-4086F1D06A63}"/>
-              </a:ext>
-            </a:extLst>
-          </p:cNvPr>
-          <p:cNvSpPr txBox="1"/>
-          <p:nvPr/>
-        </p:nvSpPr>
-        <p:spPr>
-          <a:xfrm>
-            <a:off x="1082487" y="3469826"/>
-            <a:ext cx="662361" cy="276999"/>
-          </a:xfrm>
-          <a:prstGeom prst="rect">
-            <a:avLst/>
-          </a:prstGeom>
-          <a:noFill/>
-        </p:spPr>
-        <p:txBody>
-          <a:bodyPr wrap="none" rtlCol="0">
-            <a:spAutoFit/>
-          </a:bodyPr>
-          <a:lstStyle/>
-          <a:p>
-            <a:r>
-              <a:rPr lang="en-US" sz="1200" dirty="0"/>
-              <a:t>25.11 -</a:t>
-            </a:r>
-          </a:p>
-        </p:txBody>
-      </p:sp>
-      <p:sp>
-        <p:nvSpPr>
-          <p:cNvPr id="27" name="TextBox 26">
-            <a:extLst>
-              <a:ext uri="{FF2B5EF4-FFF2-40B4-BE49-F238E27FC236}">
-                <a16:creationId xmlns:a16="http://schemas.microsoft.com/office/drawing/2014/main" id="{41F47461-4FA5-1F4E-B2BC-75B5E5DD97B3}"/>
-              </a:ext>
-            </a:extLst>
-          </p:cNvPr>
-          <p:cNvSpPr txBox="1"/>
-          <p:nvPr/>
-        </p:nvSpPr>
-        <p:spPr>
-          <a:xfrm>
-            <a:off x="1082487" y="3980043"/>
-            <a:ext cx="662361" cy="276999"/>
-          </a:xfrm>
-          <a:prstGeom prst="rect">
-            <a:avLst/>
-          </a:prstGeom>
-          <a:noFill/>
-        </p:spPr>
-        <p:txBody>
-          <a:bodyPr wrap="none" rtlCol="0">
-            <a:spAutoFit/>
-          </a:bodyPr>
-          <a:lstStyle/>
-          <a:p>
-            <a:r>
-              <a:rPr lang="en-US" sz="1200" dirty="0"/>
-              <a:t>27.11 -</a:t>
-            </a:r>
-          </a:p>
-        </p:txBody>
-      </p:sp>
       <p:pic>
         <p:nvPicPr>
           <p:cNvPr id="46" name="Google Shape;530;p82">
@@ -26645,181 +25596,6 @@
           </a:fontRef>
         </p:style>
       </p:cxnSp>
-      <p:sp>
-        <p:nvSpPr>
-          <p:cNvPr id="8" name="TextBox 7">
-            <a:extLst>
-              <a:ext uri="{FF2B5EF4-FFF2-40B4-BE49-F238E27FC236}">
-                <a16:creationId xmlns:a16="http://schemas.microsoft.com/office/drawing/2014/main" id="{6F6F7B92-1FC8-F044-8809-FBF8C1B8F030}"/>
-              </a:ext>
-            </a:extLst>
-          </p:cNvPr>
-          <p:cNvSpPr txBox="1"/>
-          <p:nvPr/>
-        </p:nvSpPr>
-        <p:spPr>
-          <a:xfrm>
-            <a:off x="1082487" y="1951507"/>
-            <a:ext cx="662361" cy="276999"/>
-          </a:xfrm>
-          <a:prstGeom prst="rect">
-            <a:avLst/>
-          </a:prstGeom>
-          <a:noFill/>
-        </p:spPr>
-        <p:txBody>
-          <a:bodyPr wrap="none" rtlCol="0">
-            <a:spAutoFit/>
-          </a:bodyPr>
-          <a:lstStyle/>
-          <a:p>
-            <a:r>
-              <a:rPr lang="en-US" sz="1200" dirty="0"/>
-              <a:t>02.12 -</a:t>
-            </a:r>
-          </a:p>
-        </p:txBody>
-      </p:sp>
-      <p:sp>
-        <p:nvSpPr>
-          <p:cNvPr id="24" name="TextBox 23">
-            <a:extLst>
-              <a:ext uri="{FF2B5EF4-FFF2-40B4-BE49-F238E27FC236}">
-                <a16:creationId xmlns:a16="http://schemas.microsoft.com/office/drawing/2014/main" id="{E5434182-F8BC-6A45-B76D-A6DDAA3D9E00}"/>
-              </a:ext>
-            </a:extLst>
-          </p:cNvPr>
-          <p:cNvSpPr txBox="1"/>
-          <p:nvPr/>
-        </p:nvSpPr>
-        <p:spPr>
-          <a:xfrm>
-            <a:off x="1082487" y="2451661"/>
-            <a:ext cx="662361" cy="276999"/>
-          </a:xfrm>
-          <a:prstGeom prst="rect">
-            <a:avLst/>
-          </a:prstGeom>
-          <a:noFill/>
-        </p:spPr>
-        <p:txBody>
-          <a:bodyPr wrap="none" rtlCol="0">
-            <a:spAutoFit/>
-          </a:bodyPr>
-          <a:lstStyle/>
-          <a:p>
-            <a:r>
-              <a:rPr lang="en-US" sz="1200" dirty="0"/>
-              <a:t>04.12 -</a:t>
-            </a:r>
-          </a:p>
-        </p:txBody>
-      </p:sp>
-      <p:sp>
-        <p:nvSpPr>
-          <p:cNvPr id="25" name="TextBox 24">
-            <a:extLst>
-              <a:ext uri="{FF2B5EF4-FFF2-40B4-BE49-F238E27FC236}">
-                <a16:creationId xmlns:a16="http://schemas.microsoft.com/office/drawing/2014/main" id="{B1FFEC08-4192-194E-9CDB-196400C6DFCC}"/>
-              </a:ext>
-            </a:extLst>
-          </p:cNvPr>
-          <p:cNvSpPr txBox="1"/>
-          <p:nvPr/>
-        </p:nvSpPr>
-        <p:spPr>
-          <a:xfrm>
-            <a:off x="1082487" y="2966252"/>
-            <a:ext cx="662361" cy="276999"/>
-          </a:xfrm>
-          <a:prstGeom prst="rect">
-            <a:avLst/>
-          </a:prstGeom>
-          <a:noFill/>
-        </p:spPr>
-        <p:txBody>
-          <a:bodyPr wrap="none" rtlCol="0">
-            <a:spAutoFit/>
-          </a:bodyPr>
-          <a:lstStyle/>
-          <a:p>
-            <a:r>
-              <a:rPr lang="en-US" sz="1200" dirty="0"/>
-              <a:t>09.12 -</a:t>
-            </a:r>
-          </a:p>
-        </p:txBody>
-      </p:sp>
-      <p:sp>
-        <p:nvSpPr>
-          <p:cNvPr id="26" name="TextBox 25">
-            <a:extLst>
-              <a:ext uri="{FF2B5EF4-FFF2-40B4-BE49-F238E27FC236}">
-                <a16:creationId xmlns:a16="http://schemas.microsoft.com/office/drawing/2014/main" id="{63DA3473-8780-494C-8D9C-4086F1D06A63}"/>
-              </a:ext>
-            </a:extLst>
-          </p:cNvPr>
-          <p:cNvSpPr txBox="1"/>
-          <p:nvPr/>
-        </p:nvSpPr>
-        <p:spPr>
-          <a:xfrm>
-            <a:off x="1082487" y="3469826"/>
-            <a:ext cx="662361" cy="276999"/>
-          </a:xfrm>
-          <a:prstGeom prst="rect">
-            <a:avLst/>
-          </a:prstGeom>
-          <a:noFill/>
-        </p:spPr>
-        <p:txBody>
-          <a:bodyPr wrap="none" rtlCol="0">
-            <a:spAutoFit/>
-          </a:bodyPr>
-          <a:lstStyle/>
-          <a:p>
-            <a:r>
-              <a:rPr lang="en-US" sz="1200" dirty="0"/>
-              <a:t>30.01 -</a:t>
-            </a:r>
-          </a:p>
-        </p:txBody>
-      </p:sp>
-      <p:sp>
-        <p:nvSpPr>
-          <p:cNvPr id="27" name="TextBox 26">
-            <a:extLst>
-              <a:ext uri="{FF2B5EF4-FFF2-40B4-BE49-F238E27FC236}">
-                <a16:creationId xmlns:a16="http://schemas.microsoft.com/office/drawing/2014/main" id="{41F47461-4FA5-1F4E-B2BC-75B5E5DD97B3}"/>
-              </a:ext>
-            </a:extLst>
-          </p:cNvPr>
-          <p:cNvSpPr txBox="1"/>
-          <p:nvPr/>
-        </p:nvSpPr>
-        <p:spPr>
-          <a:xfrm>
-            <a:off x="1082487" y="3980043"/>
-            <a:ext cx="662361" cy="276999"/>
-          </a:xfrm>
-          <a:prstGeom prst="rect">
-            <a:avLst/>
-          </a:prstGeom>
-          <a:noFill/>
-        </p:spPr>
-        <p:txBody>
-          <a:bodyPr wrap="none" rtlCol="0">
-            <a:spAutoFit/>
-          </a:bodyPr>
-          <a:lstStyle/>
-          <a:p>
-            <a:r>
-              <a:rPr lang="en-US" sz="1200" dirty="0"/>
-              <a:t>04.02 -</a:t>
-            </a:r>
-          </a:p>
-        </p:txBody>
-      </p:sp>
       <p:pic>
         <p:nvPicPr>
           <p:cNvPr id="28" name="Google Shape;225;p40">
@@ -28602,6 +27378,18 @@
               <a:buNone/>
             </a:pPr>
             <a:r>
+              <a:rPr lang="ru-RU" sz="1300" b="1" dirty="0">
+                <a:solidFill>
+                  <a:schemeClr val="dk1"/>
+                </a:solidFill>
+                <a:latin typeface="Roboto"/>
+                <a:ea typeface="Roboto"/>
+                <a:cs typeface="Roboto"/>
+                <a:sym typeface="Roboto"/>
+              </a:rPr>
+              <a:t>Два раза в неделю</a:t>
+            </a:r>
+            <a:r>
               <a:rPr lang="ru" sz="1300" b="1" dirty="0">
                 <a:solidFill>
                   <a:schemeClr val="dk1"/>
@@ -28611,7 +27399,7 @@
                 <a:cs typeface="Roboto"/>
                 <a:sym typeface="Roboto"/>
               </a:rPr>
-              <a:t>Понедельник, среда, 20:00.</a:t>
+              <a:t>, 20:00.</a:t>
             </a:r>
             <a:endParaRPr sz="1300" b="1" dirty="0">
               <a:latin typeface="Roboto"/>
@@ -29182,7 +27970,31 @@
                 <a:cs typeface="Roboto"/>
                 <a:sym typeface="Roboto"/>
               </a:rPr>
-              <a:t>ML-Finance-2024-07</a:t>
+              <a:t>ML-Finance-2024-</a:t>
+            </a:r>
+            <a:r>
+              <a:rPr lang="ru-RU" sz="1300" b="1" dirty="0">
+                <a:solidFill>
+                  <a:schemeClr val="dk1"/>
+                </a:solidFill>
+                <a:latin typeface="Roboto"/>
+                <a:ea typeface="Roboto"/>
+                <a:cs typeface="Roboto"/>
+                <a:sym typeface="Roboto"/>
+              </a:rPr>
+              <a:t>1</a:t>
+            </a:r>
+            <a:r>
+              <a:rPr lang="en-US" sz="1300" b="1" dirty="0">
+                <a:solidFill>
+                  <a:schemeClr val="dk1"/>
+                </a:solidFill>
+                <a:latin typeface="Roboto"/>
+                <a:ea typeface="Roboto"/>
+                <a:cs typeface="Roboto"/>
+                <a:sym typeface="Roboto"/>
+              </a:rPr>
+              <a:t>0</a:t>
             </a:r>
             <a:endParaRPr sz="1300" b="1" dirty="0">
               <a:latin typeface="Roboto"/>
@@ -35300,8 +34112,8 @@
           </a:p>
         </p:txBody>
       </p:sp>
-      <mc:AlternateContent xmlns:mc="http://schemas.openxmlformats.org/markup-compatibility/2006">
-        <mc:Choice xmlns:a14="http://schemas.microsoft.com/office/drawing/2010/main" Requires="a14">
+      <mc:AlternateContent xmlns:mc="http://schemas.openxmlformats.org/markup-compatibility/2006" xmlns:a14="http://schemas.microsoft.com/office/drawing/2010/main">
+        <mc:Choice Requires="a14">
           <p:sp>
             <p:nvSpPr>
               <p:cNvPr id="2" name="TextBox 1">
@@ -35751,7 +34563,7 @@
             </p:txBody>
           </p:sp>
         </mc:Choice>
-        <mc:Fallback>
+        <mc:Fallback xmlns="">
           <p:sp>
             <p:nvSpPr>
               <p:cNvPr id="2" name="TextBox 1">
@@ -39719,7 +38531,16 @@
                 <a:cs typeface="Roboto"/>
                 <a:sym typeface="Roboto"/>
               </a:rPr>
-              <a:t>ML-Finance-2024-07</a:t>
+              <a:t>ML-Finance-2024-</a:t>
+            </a:r>
+            <a:r>
+              <a:rPr lang="ru-RU" sz="1500" b="1" dirty="0">
+                <a:latin typeface="Roboto"/>
+                <a:ea typeface="Roboto"/>
+                <a:cs typeface="Roboto"/>
+                <a:sym typeface="Roboto"/>
+              </a:rPr>
+              <a:t>10</a:t>
             </a:r>
             <a:endParaRPr sz="1500" dirty="0">
               <a:latin typeface="Roboto"/>
@@ -43986,7 +42807,7 @@
                 <a:cs typeface="Roboto"/>
                 <a:sym typeface="Roboto"/>
               </a:rPr>
-              <a:t>7</a:t>
+              <a:t>6</a:t>
             </a:r>
             <a:r>
               <a:rPr lang="ru" sz="1500" dirty="0">
@@ -44010,7 +42831,7 @@
                 <a:cs typeface="Roboto"/>
                 <a:sym typeface="Roboto"/>
               </a:rPr>
-              <a:t>марта</a:t>
+              <a:t>ноября</a:t>
             </a:r>
             <a:r>
               <a:rPr lang="ru" sz="1500" dirty="0">
@@ -44045,7 +42866,7 @@
         <p:spPr>
           <a:xfrm>
             <a:off x="1915425" y="1826708"/>
-            <a:ext cx="6156900" cy="569356"/>
+            <a:ext cx="6156900" cy="954077"/>
           </a:xfrm>
           <a:prstGeom prst="rect">
             <a:avLst/>
@@ -44080,7 +42901,7 @@
                 <a:cs typeface="Roboto"/>
                 <a:sym typeface="Roboto"/>
               </a:rPr>
-              <a:t>Метод градиентного спуска</a:t>
+              <a:t>Основы машинного обучения и его применение в финансах</a:t>
             </a:r>
             <a:endParaRPr sz="2400" b="1" dirty="0">
               <a:solidFill>
@@ -45011,7 +43832,7 @@
               <a:buNone/>
             </a:pPr>
             <a:r>
-              <a:rPr lang="ru" sz="1600" b="1" u="sng">
+              <a:rPr lang="ru" sz="1600" b="1" u="sng" dirty="0">
                 <a:solidFill>
                   <a:schemeClr val="hlink"/>
                 </a:solidFill>
@@ -45019,7 +43840,7 @@
               </a:rPr>
               <a:t>Полезный курс о том, как эффективно учиться </a:t>
             </a:r>
-            <a:endParaRPr sz="1600" b="1">
+            <a:endParaRPr sz="1600" b="1" dirty="0">
               <a:solidFill>
                 <a:srgbClr val="FF9900"/>
               </a:solidFill>

--- a/FinML/01 - Intro/Presentation/01 - Intro.pptx
+++ b/FinML/01 - Intro/Presentation/01 - Intro.pptx
@@ -16323,7 +16323,69 @@
               <a:rPr lang="ru" sz="1200" dirty="0"/>
               <a:t>Руководил командой, решающей прикладные задачи, вывод готовых моделей в продакшн и поддержку решений у клиента</a:t>
             </a:r>
-            <a:endParaRPr sz="1200" dirty="0"/>
+          </a:p>
+          <a:p>
+            <a:pPr marL="0" lvl="0" indent="0" algn="l" rtl="0">
+              <a:lnSpc>
+                <a:spcPct val="100000"/>
+              </a:lnSpc>
+              <a:spcBef>
+                <a:spcPts val="0"/>
+              </a:spcBef>
+              <a:spcAft>
+                <a:spcPts val="0"/>
+              </a:spcAft>
+              <a:buSzPts val="597"/>
+              <a:buNone/>
+            </a:pPr>
+            <a:endParaRPr lang="ru" sz="1200" dirty="0"/>
+          </a:p>
+          <a:p>
+            <a:pPr marL="1470025" lvl="0" indent="-1463675" algn="l" rtl="0">
+              <a:lnSpc>
+                <a:spcPct val="100000"/>
+              </a:lnSpc>
+              <a:spcBef>
+                <a:spcPts val="0"/>
+              </a:spcBef>
+              <a:spcAft>
+                <a:spcPts val="0"/>
+              </a:spcAft>
+              <a:buSzPts val="597"/>
+              <a:buNone/>
+            </a:pPr>
+            <a:r>
+              <a:rPr lang="ru-RU" sz="1200" b="1" dirty="0"/>
+              <a:t>Р</a:t>
+            </a:r>
+            <a:r>
+              <a:rPr lang="ru" sz="1200" b="1" dirty="0"/>
+              <a:t>уковожу курсами: </a:t>
+            </a:r>
+            <a:r>
+              <a:rPr lang="en-US" sz="1200" b="1" dirty="0" err="1"/>
+              <a:t>FinML</a:t>
+            </a:r>
+            <a:r>
+              <a:rPr lang="en-US" sz="1200" b="1" dirty="0"/>
+              <a:t>, Reinforcement learning, </a:t>
+            </a:r>
+            <a:r>
+              <a:rPr lang="en-US" sz="1200" b="1" dirty="0" err="1"/>
+              <a:t>MLOps</a:t>
+            </a:r>
+            <a:r>
+              <a:rPr lang="en-US" sz="1200" b="1" dirty="0"/>
+              <a:t>, </a:t>
+            </a:r>
+            <a:br>
+              <a:rPr lang="en-US" sz="1200" b="1" dirty="0"/>
+            </a:br>
+            <a:r>
+              <a:rPr lang="en-US" sz="1200" b="1" dirty="0"/>
+              <a:t>ML Pro, ML Basic.</a:t>
+            </a:r>
+            <a:endParaRPr sz="1200" b="1" dirty="0"/>
           </a:p>
         </p:txBody>
       </p:sp>
@@ -27970,31 +28032,7 @@
                 <a:cs typeface="Roboto"/>
                 <a:sym typeface="Roboto"/>
               </a:rPr>
-              <a:t>ML-Finance-2024-</a:t>
-            </a:r>
-            <a:r>
-              <a:rPr lang="ru-RU" sz="1300" b="1" dirty="0">
-                <a:solidFill>
-                  <a:schemeClr val="dk1"/>
-                </a:solidFill>
-                <a:latin typeface="Roboto"/>
-                <a:ea typeface="Roboto"/>
-                <a:cs typeface="Roboto"/>
-                <a:sym typeface="Roboto"/>
-              </a:rPr>
-              <a:t>1</a:t>
-            </a:r>
-            <a:r>
-              <a:rPr lang="en-US" sz="1300" b="1" dirty="0">
-                <a:solidFill>
-                  <a:schemeClr val="dk1"/>
-                </a:solidFill>
-                <a:latin typeface="Roboto"/>
-                <a:ea typeface="Roboto"/>
-                <a:cs typeface="Roboto"/>
-                <a:sym typeface="Roboto"/>
-              </a:rPr>
-              <a:t>0</a:t>
+              <a:t>ML-Finance-2025-01</a:t>
             </a:r>
             <a:endParaRPr sz="1300" b="1" dirty="0">
               <a:latin typeface="Roboto"/>
@@ -38438,7 +38476,7 @@
         <p:spPr>
           <a:xfrm>
             <a:off x="1654524" y="2049300"/>
-            <a:ext cx="2917475" cy="877133"/>
+            <a:ext cx="2917475" cy="646300"/>
           </a:xfrm>
           <a:prstGeom prst="rect">
             <a:avLst/>
@@ -38497,50 +38535,6 @@
                 <a:sym typeface="Roboto"/>
               </a:rPr>
               <a:t>в учебной группе </a:t>
-            </a:r>
-            <a:br>
-              <a:rPr lang="en-US" sz="1500" dirty="0">
-                <a:latin typeface="Roboto"/>
-                <a:ea typeface="Roboto"/>
-                <a:cs typeface="Roboto"/>
-                <a:sym typeface="Roboto"/>
-              </a:rPr>
-            </a:br>
-            <a:r>
-              <a:rPr lang="ru" sz="1500" dirty="0">
-                <a:latin typeface="Roboto"/>
-                <a:ea typeface="Roboto"/>
-                <a:cs typeface="Roboto"/>
-                <a:sym typeface="Roboto"/>
-              </a:rPr>
-              <a:t>#</a:t>
-            </a:r>
-            <a:r>
-              <a:rPr lang="ru" sz="1500" b="1" dirty="0">
-                <a:latin typeface="Roboto"/>
-                <a:ea typeface="Roboto"/>
-                <a:cs typeface="Roboto"/>
-                <a:sym typeface="Roboto"/>
-              </a:rPr>
-              <a:t>OTUS </a:t>
-            </a:r>
-            <a:r>
-              <a:rPr lang="en-US" sz="1500" b="1" dirty="0">
-                <a:latin typeface="Roboto"/>
-                <a:ea typeface="Roboto"/>
-                <a:cs typeface="Roboto"/>
-                <a:sym typeface="Roboto"/>
-              </a:rPr>
-              <a:t>ML-Finance-2024-</a:t>
-            </a:r>
-            <a:r>
-              <a:rPr lang="ru-RU" sz="1500" b="1" dirty="0">
-                <a:latin typeface="Roboto"/>
-                <a:ea typeface="Roboto"/>
-                <a:cs typeface="Roboto"/>
-                <a:sym typeface="Roboto"/>
-              </a:rPr>
-              <a:t>10</a:t>
             </a:r>
             <a:endParaRPr sz="1500" dirty="0">
               <a:latin typeface="Roboto"/>
@@ -42831,7 +42825,7 @@
                 <a:cs typeface="Roboto"/>
                 <a:sym typeface="Roboto"/>
               </a:rPr>
-              <a:t>ноября</a:t>
+              <a:t>февраля</a:t>
             </a:r>
             <a:r>
               <a:rPr lang="ru" sz="1500" dirty="0">
@@ -42843,7 +42837,7 @@
                 <a:cs typeface="Roboto"/>
                 <a:sym typeface="Roboto"/>
               </a:rPr>
-              <a:t> 2024</a:t>
+              <a:t> 2025</a:t>
             </a:r>
             <a:endParaRPr sz="1500" dirty="0">
               <a:solidFill>
